--- a/T9960_crescent_251612601002.pptx
+++ b/T9960_crescent_251612601002.pptx
@@ -11571,7 +11571,7 @@
         </p:blipFill>
         <p:spPr>
           <a:xfrm>
-            <a:off x="0" y="0"/>
+            <a:off x="-91440" y="0"/>
             <a:ext cx="12192000" cy="6858000"/>
           </a:xfrm>
           <a:prstGeom prst="rect">
@@ -11598,7 +11598,7 @@
         </p:blipFill>
         <p:spPr>
           <a:xfrm>
-            <a:off x="414338" y="1786904"/>
+            <a:off x="322898" y="1786904"/>
             <a:ext cx="5419725" cy="1962150"/>
           </a:xfrm>
           <a:prstGeom prst="rect">
@@ -11625,7 +11625,7 @@
         </p:blipFill>
         <p:spPr>
           <a:xfrm>
-            <a:off x="6096000" y="1835794"/>
+            <a:off x="6004560" y="1835794"/>
             <a:ext cx="5419725" cy="1962150"/>
           </a:xfrm>
           <a:prstGeom prst="rect">
@@ -11645,7 +11645,7 @@
         </p:nvSpPr>
         <p:spPr>
           <a:xfrm>
-            <a:off x="523875" y="819150"/>
+            <a:off x="432435" y="819150"/>
             <a:ext cx="11668125" cy="553998"/>
           </a:xfrm>
           <a:prstGeom prst="rect">
@@ -11701,7 +11701,7 @@
         </p:nvSpPr>
         <p:spPr>
           <a:xfrm>
-            <a:off x="523875" y="1942240"/>
+            <a:off x="432435" y="1942240"/>
             <a:ext cx="4770596" cy="242374"/>
           </a:xfrm>
           <a:prstGeom prst="rect">
@@ -11754,7 +11754,7 @@
         </p:nvSpPr>
         <p:spPr>
           <a:xfrm>
-            <a:off x="523875" y="2244737"/>
+            <a:off x="432435" y="2244737"/>
             <a:ext cx="4829175" cy="1107996"/>
           </a:xfrm>
           <a:prstGeom prst="rect">
@@ -11810,7 +11810,7 @@
         </p:nvSpPr>
         <p:spPr>
           <a:xfrm>
-            <a:off x="6248401" y="2013677"/>
+            <a:off x="6156961" y="2013677"/>
             <a:ext cx="4770596" cy="242374"/>
           </a:xfrm>
           <a:prstGeom prst="rect">
@@ -11863,7 +11863,7 @@
         </p:nvSpPr>
         <p:spPr>
           <a:xfrm>
-            <a:off x="6189822" y="2359669"/>
+            <a:off x="6098382" y="2359669"/>
             <a:ext cx="4829175" cy="1107996"/>
           </a:xfrm>
           <a:prstGeom prst="rect">
@@ -11926,13 +11926,13 @@
           <p:nvPr>
             <p:extLst>
               <p:ext uri="{D42A27DB-BD31-4B8C-83A1-F6EECF244321}">
-                <p14:modId xmlns:p14="http://schemas.microsoft.com/office/powerpoint/2010/main" val="3421918035"/>
+                <p14:modId xmlns:p14="http://schemas.microsoft.com/office/powerpoint/2010/main" val="76532374"/>
               </p:ext>
             </p:extLst>
           </p:nvPr>
         </p:nvGraphicFramePr>
         <p:xfrm>
-          <a:off x="6725569" y="4501042"/>
+          <a:off x="6634129" y="4501042"/>
           <a:ext cx="4902839" cy="1699832"/>
         </p:xfrm>
         <a:graphic>
@@ -13185,8 +13185,8 @@
         </p:nvSpPr>
         <p:spPr>
           <a:xfrm>
-            <a:off x="452045" y="4392351"/>
-            <a:ext cx="5496268" cy="1050993"/>
+            <a:off x="360605" y="4392351"/>
+            <a:ext cx="5496268" cy="1386470"/>
           </a:xfrm>
           <a:prstGeom prst="rect">
             <a:avLst/>
@@ -13199,29 +13199,14 @@
           </a:bodyPr>
           <a:lstStyle/>
           <a:p>
-            <a:pPr marL="0" marR="0" lvl="0" indent="0" algn="just" rtl="0">
+            <a:pPr lvl="0" algn="just">
               <a:lnSpc>
                 <a:spcPct val="154933"/>
               </a:lnSpc>
-              <a:spcBef>
-                <a:spcPts val="0"/>
-              </a:spcBef>
-              <a:spcAft>
-                <a:spcPts val="0"/>
-              </a:spcAft>
-              <a:buNone/>
             </a:pPr>
             <a:r>
-              <a:rPr lang="en-GB" sz="1400" b="0" i="0" u="none" strike="noStrike" cap="none" dirty="0">
-                <a:solidFill>
-                  <a:srgbClr val="475569"/>
-                </a:solidFill>
-                <a:latin typeface="Times New Roman" panose="02020603050405020304" pitchFamily="18" charset="0"/>
-                <a:ea typeface="Lato"/>
-                <a:cs typeface="Times New Roman" panose="02020603050405020304" pitchFamily="18" charset="0"/>
-                <a:sym typeface="Lato"/>
-              </a:rPr>
-              <a:t>An image-based food dataset containing categorized ingredient photos. Used to train and evaluate Computer Vision models for automatic ingredient recognition.</a:t>
+              <a:rPr lang="en-GB" dirty="0"/>
+              <a:t>This dataset contains a collection of food recipes along with their corresponding food images, ingredient lists, and cooking instructions. It allows the system to identify recipes that can be prepared using the ingredients available to the user.</a:t>
             </a:r>
             <a:endParaRPr lang="en-GB" dirty="0">
               <a:latin typeface="Times New Roman" panose="02020603050405020304" pitchFamily="18" charset="0"/>
@@ -13244,7 +13229,7 @@
         </p:nvSpPr>
         <p:spPr>
           <a:xfrm>
-            <a:off x="462358" y="4183523"/>
+            <a:off x="370918" y="4183523"/>
             <a:ext cx="6169842" cy="307777"/>
           </a:xfrm>
           <a:prstGeom prst="rect">
@@ -13258,141 +13243,13 @@
           </a:bodyPr>
           <a:lstStyle/>
           <a:p>
-            <a:pPr marL="0" marR="0" lvl="0" indent="0" algn="just" rtl="0">
-              <a:spcBef>
-                <a:spcPts val="0"/>
-              </a:spcBef>
-              <a:spcAft>
-                <a:spcPts val="0"/>
-              </a:spcAft>
-              <a:buNone/>
-            </a:pPr>
+            <a:pPr lvl="0" algn="just"/>
             <a:r>
-              <a:rPr lang="en-US" sz="1400" b="1" i="0" u="none" strike="noStrike" cap="none" dirty="0">
-                <a:solidFill>
-                  <a:srgbClr val="0F172A"/>
-                </a:solidFill>
+              <a:rPr lang="en-IN" b="1" dirty="0">
                 <a:latin typeface="Times New Roman" panose="02020603050405020304" pitchFamily="18" charset="0"/>
-                <a:ea typeface="Poppins SemiBold"/>
                 <a:cs typeface="Times New Roman" panose="02020603050405020304" pitchFamily="18" charset="0"/>
-                <a:sym typeface="Poppins SemiBold"/>
               </a:rPr>
-              <a:t>Ingredients-101 Dataset</a:t>
-            </a:r>
-            <a:endParaRPr lang="en-US" b="1" dirty="0">
-              <a:latin typeface="Times New Roman" panose="02020603050405020304" pitchFamily="18" charset="0"/>
-              <a:cs typeface="Times New Roman" panose="02020603050405020304" pitchFamily="18" charset="0"/>
-            </a:endParaRPr>
-          </a:p>
-        </p:txBody>
-      </p:sp>
-      <p:sp>
-        <p:nvSpPr>
-          <p:cNvPr id="9" name="TextBox 8">
-            <a:extLst>
-              <a:ext uri="{FF2B5EF4-FFF2-40B4-BE49-F238E27FC236}">
-                <a16:creationId xmlns:a16="http://schemas.microsoft.com/office/drawing/2014/main" id="{5D38B024-FAA3-56C7-9648-23D08B5FBD58}"/>
-              </a:ext>
-            </a:extLst>
-          </p:cNvPr>
-          <p:cNvSpPr txBox="1"/>
-          <p:nvPr/>
-        </p:nvSpPr>
-        <p:spPr>
-          <a:xfrm>
-            <a:off x="452045" y="5659847"/>
-            <a:ext cx="5382018" cy="1050993"/>
-          </a:xfrm>
-          <a:prstGeom prst="rect">
-            <a:avLst/>
-          </a:prstGeom>
-          <a:noFill/>
-        </p:spPr>
-        <p:txBody>
-          <a:bodyPr wrap="square">
-            <a:spAutoFit/>
-          </a:bodyPr>
-          <a:lstStyle/>
-          <a:p>
-            <a:pPr marL="0" marR="0" lvl="0" indent="0" algn="just" rtl="0">
-              <a:lnSpc>
-                <a:spcPct val="154933"/>
-              </a:lnSpc>
-              <a:spcBef>
-                <a:spcPts val="0"/>
-              </a:spcBef>
-              <a:spcAft>
-                <a:spcPts val="0"/>
-              </a:spcAft>
-              <a:buNone/>
-            </a:pPr>
-            <a:r>
-              <a:rPr lang="en-GB" sz="1400" b="0" i="0" u="none" strike="noStrike" cap="none" dirty="0">
-                <a:solidFill>
-                  <a:srgbClr val="475569"/>
-                </a:solidFill>
-                <a:latin typeface="Times New Roman" panose="02020603050405020304" pitchFamily="18" charset="0"/>
-                <a:ea typeface="Lato"/>
-                <a:cs typeface="Times New Roman" panose="02020603050405020304" pitchFamily="18" charset="0"/>
-                <a:sym typeface="Lato"/>
-              </a:rPr>
-              <a:t>A massive dataset with 1M+ structured recipes (titles, ingredients, photos, instructions). Serves as the primary RAG knowledge retrieval foundation.</a:t>
-            </a:r>
-            <a:endParaRPr lang="en-GB" dirty="0">
-              <a:latin typeface="Times New Roman" panose="02020603050405020304" pitchFamily="18" charset="0"/>
-              <a:cs typeface="Times New Roman" panose="02020603050405020304" pitchFamily="18" charset="0"/>
-            </a:endParaRPr>
-          </a:p>
-        </p:txBody>
-      </p:sp>
-      <p:sp>
-        <p:nvSpPr>
-          <p:cNvPr id="11" name="TextBox 10">
-            <a:extLst>
-              <a:ext uri="{FF2B5EF4-FFF2-40B4-BE49-F238E27FC236}">
-                <a16:creationId xmlns:a16="http://schemas.microsoft.com/office/drawing/2014/main" id="{F63C1FF4-6199-7C51-DD00-1C7B66B191B2}"/>
-              </a:ext>
-            </a:extLst>
-          </p:cNvPr>
-          <p:cNvSpPr txBox="1"/>
-          <p:nvPr/>
-        </p:nvSpPr>
-        <p:spPr>
-          <a:xfrm>
-            <a:off x="414338" y="5471287"/>
-            <a:ext cx="6169842" cy="307777"/>
-          </a:xfrm>
-          <a:prstGeom prst="rect">
-            <a:avLst/>
-          </a:prstGeom>
-          <a:noFill/>
-        </p:spPr>
-        <p:txBody>
-          <a:bodyPr wrap="square">
-            <a:spAutoFit/>
-          </a:bodyPr>
-          <a:lstStyle/>
-          <a:p>
-            <a:pPr marL="0" marR="0" lvl="0" indent="0" algn="just" rtl="0">
-              <a:spcBef>
-                <a:spcPts val="0"/>
-              </a:spcBef>
-              <a:spcAft>
-                <a:spcPts val="0"/>
-              </a:spcAft>
-              <a:buNone/>
-            </a:pPr>
-            <a:r>
-              <a:rPr lang="en-US" sz="1400" b="1" i="0" u="none" strike="noStrike" cap="none" dirty="0">
-                <a:solidFill>
-                  <a:srgbClr val="0F172A"/>
-                </a:solidFill>
-                <a:latin typeface="Times New Roman" panose="02020603050405020304" pitchFamily="18" charset="0"/>
-                <a:ea typeface="Poppins SemiBold"/>
-                <a:cs typeface="Times New Roman" panose="02020603050405020304" pitchFamily="18" charset="0"/>
-                <a:sym typeface="Poppins SemiBold"/>
-              </a:rPr>
-              <a:t>Recipe1M+ Dataset</a:t>
+              <a:t>Food Ingredients &amp; Recipe Dataset</a:t>
             </a:r>
             <a:endParaRPr lang="en-US" b="1" dirty="0">
               <a:latin typeface="Times New Roman" panose="02020603050405020304" pitchFamily="18" charset="0"/>
@@ -13415,7 +13272,7 @@
         </p:nvSpPr>
         <p:spPr>
           <a:xfrm>
-            <a:off x="6041681" y="3797944"/>
+            <a:off x="5950241" y="3797944"/>
             <a:ext cx="4752009" cy="821763"/>
           </a:xfrm>
           <a:prstGeom prst="rect">
@@ -13468,7 +13325,7 @@
         </p:nvSpPr>
         <p:spPr>
           <a:xfrm>
-            <a:off x="141403" y="3797944"/>
+            <a:off x="49963" y="3797944"/>
             <a:ext cx="1404594" cy="307777"/>
           </a:xfrm>
           <a:prstGeom prst="rect">
